--- a/聖潔全能主.pptx
+++ b/聖潔全能主.pptx
@@ -165,10 +165,9 @@
           <a:lstStyle/>
           <a:p>
             <a:r>
-              <a:rPr lang="zh-TW" altLang="en-US" smtClean="0"/>
+              <a:rPr lang="zh-TW" altLang="en-US"/>
               <a:t>按一下以編輯母片標題樣式</a:t>
             </a:r>
-            <a:endParaRPr lang="zh-TW" altLang="en-US"/>
           </a:p>
         </p:txBody>
       </p:sp>
@@ -284,10 +283,9 @@
           </a:lstStyle>
           <a:p>
             <a:r>
-              <a:rPr lang="zh-TW" altLang="en-US" smtClean="0"/>
+              <a:rPr lang="zh-TW" altLang="en-US"/>
               <a:t>按一下以編輯母片副標題樣式</a:t>
             </a:r>
-            <a:endParaRPr lang="zh-TW" altLang="en-US"/>
           </a:p>
         </p:txBody>
       </p:sp>
@@ -309,7 +307,7 @@
             <a:fld id="{3C8AB4AA-1402-46B5-846B-A57FD5AF7562}" type="datetimeFigureOut">
               <a:rPr lang="zh-TW" altLang="en-US" smtClean="0"/>
               <a:pPr/>
-              <a:t>2020/10/30</a:t>
+              <a:t>2025/1/3</a:t>
             </a:fld>
             <a:endParaRPr lang="zh-TW" altLang="en-US"/>
           </a:p>
@@ -399,10 +397,9 @@
           <a:lstStyle/>
           <a:p>
             <a:r>
-              <a:rPr lang="zh-TW" altLang="en-US" smtClean="0"/>
+              <a:rPr lang="zh-TW" altLang="en-US"/>
               <a:t>按一下以編輯母片標題樣式</a:t>
             </a:r>
-            <a:endParaRPr lang="zh-TW" altLang="en-US"/>
           </a:p>
         </p:txBody>
       </p:sp>
@@ -423,38 +420,37 @@
           <a:p>
             <a:pPr lvl="0"/>
             <a:r>
-              <a:rPr lang="zh-TW" altLang="en-US" smtClean="0"/>
+              <a:rPr lang="zh-TW" altLang="en-US"/>
               <a:t>按一下以編輯母片文字樣式</a:t>
             </a:r>
           </a:p>
           <a:p>
             <a:pPr lvl="1"/>
             <a:r>
-              <a:rPr lang="zh-TW" altLang="en-US" smtClean="0"/>
+              <a:rPr lang="zh-TW" altLang="en-US"/>
               <a:t>第二層</a:t>
             </a:r>
           </a:p>
           <a:p>
             <a:pPr lvl="2"/>
             <a:r>
-              <a:rPr lang="zh-TW" altLang="en-US" smtClean="0"/>
+              <a:rPr lang="zh-TW" altLang="en-US"/>
               <a:t>第三層</a:t>
             </a:r>
           </a:p>
           <a:p>
             <a:pPr lvl="3"/>
             <a:r>
-              <a:rPr lang="zh-TW" altLang="en-US" smtClean="0"/>
+              <a:rPr lang="zh-TW" altLang="en-US"/>
               <a:t>第四層</a:t>
             </a:r>
           </a:p>
           <a:p>
             <a:pPr lvl="4"/>
             <a:r>
-              <a:rPr lang="zh-TW" altLang="en-US" smtClean="0"/>
+              <a:rPr lang="zh-TW" altLang="en-US"/>
               <a:t>第五層</a:t>
             </a:r>
-            <a:endParaRPr lang="zh-TW" altLang="en-US"/>
           </a:p>
         </p:txBody>
       </p:sp>
@@ -476,7 +472,7 @@
             <a:fld id="{3C8AB4AA-1402-46B5-846B-A57FD5AF7562}" type="datetimeFigureOut">
               <a:rPr lang="zh-TW" altLang="en-US" smtClean="0"/>
               <a:pPr/>
-              <a:t>2020/10/30</a:t>
+              <a:t>2025/1/3</a:t>
             </a:fld>
             <a:endParaRPr lang="zh-TW" altLang="en-US"/>
           </a:p>
@@ -571,10 +567,9 @@
           <a:lstStyle/>
           <a:p>
             <a:r>
-              <a:rPr lang="zh-TW" altLang="en-US" smtClean="0"/>
+              <a:rPr lang="zh-TW" altLang="en-US"/>
               <a:t>按一下以編輯母片標題樣式</a:t>
             </a:r>
-            <a:endParaRPr lang="zh-TW" altLang="en-US"/>
           </a:p>
         </p:txBody>
       </p:sp>
@@ -600,38 +595,37 @@
           <a:p>
             <a:pPr lvl="0"/>
             <a:r>
-              <a:rPr lang="zh-TW" altLang="en-US" smtClean="0"/>
+              <a:rPr lang="zh-TW" altLang="en-US"/>
               <a:t>按一下以編輯母片文字樣式</a:t>
             </a:r>
           </a:p>
           <a:p>
             <a:pPr lvl="1"/>
             <a:r>
-              <a:rPr lang="zh-TW" altLang="en-US" smtClean="0"/>
+              <a:rPr lang="zh-TW" altLang="en-US"/>
               <a:t>第二層</a:t>
             </a:r>
           </a:p>
           <a:p>
             <a:pPr lvl="2"/>
             <a:r>
-              <a:rPr lang="zh-TW" altLang="en-US" smtClean="0"/>
+              <a:rPr lang="zh-TW" altLang="en-US"/>
               <a:t>第三層</a:t>
             </a:r>
           </a:p>
           <a:p>
             <a:pPr lvl="3"/>
             <a:r>
-              <a:rPr lang="zh-TW" altLang="en-US" smtClean="0"/>
+              <a:rPr lang="zh-TW" altLang="en-US"/>
               <a:t>第四層</a:t>
             </a:r>
           </a:p>
           <a:p>
             <a:pPr lvl="4"/>
             <a:r>
-              <a:rPr lang="zh-TW" altLang="en-US" smtClean="0"/>
+              <a:rPr lang="zh-TW" altLang="en-US"/>
               <a:t>第五層</a:t>
             </a:r>
-            <a:endParaRPr lang="zh-TW" altLang="en-US"/>
           </a:p>
         </p:txBody>
       </p:sp>
@@ -653,7 +647,7 @@
             <a:fld id="{3C8AB4AA-1402-46B5-846B-A57FD5AF7562}" type="datetimeFigureOut">
               <a:rPr lang="zh-TW" altLang="en-US" smtClean="0"/>
               <a:pPr/>
-              <a:t>2020/10/30</a:t>
+              <a:t>2025/1/3</a:t>
             </a:fld>
             <a:endParaRPr lang="zh-TW" altLang="en-US"/>
           </a:p>
@@ -743,10 +737,9 @@
           <a:lstStyle/>
           <a:p>
             <a:r>
-              <a:rPr lang="zh-TW" altLang="en-US" smtClean="0"/>
+              <a:rPr lang="zh-TW" altLang="en-US"/>
               <a:t>按一下以編輯母片標題樣式</a:t>
             </a:r>
-            <a:endParaRPr lang="zh-TW" altLang="en-US"/>
           </a:p>
         </p:txBody>
       </p:sp>
@@ -767,38 +760,37 @@
           <a:p>
             <a:pPr lvl="0"/>
             <a:r>
-              <a:rPr lang="zh-TW" altLang="en-US" smtClean="0"/>
+              <a:rPr lang="zh-TW" altLang="en-US"/>
               <a:t>按一下以編輯母片文字樣式</a:t>
             </a:r>
           </a:p>
           <a:p>
             <a:pPr lvl="1"/>
             <a:r>
-              <a:rPr lang="zh-TW" altLang="en-US" smtClean="0"/>
+              <a:rPr lang="zh-TW" altLang="en-US"/>
               <a:t>第二層</a:t>
             </a:r>
           </a:p>
           <a:p>
             <a:pPr lvl="2"/>
             <a:r>
-              <a:rPr lang="zh-TW" altLang="en-US" smtClean="0"/>
+              <a:rPr lang="zh-TW" altLang="en-US"/>
               <a:t>第三層</a:t>
             </a:r>
           </a:p>
           <a:p>
             <a:pPr lvl="3"/>
             <a:r>
-              <a:rPr lang="zh-TW" altLang="en-US" smtClean="0"/>
+              <a:rPr lang="zh-TW" altLang="en-US"/>
               <a:t>第四層</a:t>
             </a:r>
           </a:p>
           <a:p>
             <a:pPr lvl="4"/>
             <a:r>
-              <a:rPr lang="zh-TW" altLang="en-US" smtClean="0"/>
+              <a:rPr lang="zh-TW" altLang="en-US"/>
               <a:t>第五層</a:t>
             </a:r>
-            <a:endParaRPr lang="zh-TW" altLang="en-US"/>
           </a:p>
         </p:txBody>
       </p:sp>
@@ -820,7 +812,7 @@
             <a:fld id="{3C8AB4AA-1402-46B5-846B-A57FD5AF7562}" type="datetimeFigureOut">
               <a:rPr lang="zh-TW" altLang="en-US" smtClean="0"/>
               <a:pPr/>
-              <a:t>2020/10/30</a:t>
+              <a:t>2025/1/3</a:t>
             </a:fld>
             <a:endParaRPr lang="zh-TW" altLang="en-US"/>
           </a:p>
@@ -919,10 +911,9 @@
           </a:lstStyle>
           <a:p>
             <a:r>
-              <a:rPr lang="zh-TW" altLang="en-US" smtClean="0"/>
+              <a:rPr lang="zh-TW" altLang="en-US"/>
               <a:t>按一下以編輯母片標題樣式</a:t>
             </a:r>
-            <a:endParaRPr lang="zh-TW" altLang="en-US"/>
           </a:p>
         </p:txBody>
       </p:sp>
@@ -1039,7 +1030,7 @@
           <a:p>
             <a:pPr lvl="0"/>
             <a:r>
-              <a:rPr lang="zh-TW" altLang="en-US" smtClean="0"/>
+              <a:rPr lang="zh-TW" altLang="en-US"/>
               <a:t>按一下以編輯母片文字樣式</a:t>
             </a:r>
           </a:p>
@@ -1063,7 +1054,7 @@
             <a:fld id="{3C8AB4AA-1402-46B5-846B-A57FD5AF7562}" type="datetimeFigureOut">
               <a:rPr lang="zh-TW" altLang="en-US" smtClean="0"/>
               <a:pPr/>
-              <a:t>2020/10/30</a:t>
+              <a:t>2025/1/3</a:t>
             </a:fld>
             <a:endParaRPr lang="zh-TW" altLang="en-US"/>
           </a:p>
@@ -1153,10 +1144,9 @@
           <a:lstStyle/>
           <a:p>
             <a:r>
-              <a:rPr lang="zh-TW" altLang="en-US" smtClean="0"/>
+              <a:rPr lang="zh-TW" altLang="en-US"/>
               <a:t>按一下以編輯母片標題樣式</a:t>
             </a:r>
-            <a:endParaRPr lang="zh-TW" altLang="en-US"/>
           </a:p>
         </p:txBody>
       </p:sp>
@@ -1210,38 +1200,37 @@
           <a:p>
             <a:pPr lvl="0"/>
             <a:r>
-              <a:rPr lang="zh-TW" altLang="en-US" smtClean="0"/>
+              <a:rPr lang="zh-TW" altLang="en-US"/>
               <a:t>按一下以編輯母片文字樣式</a:t>
             </a:r>
           </a:p>
           <a:p>
             <a:pPr lvl="1"/>
             <a:r>
-              <a:rPr lang="zh-TW" altLang="en-US" smtClean="0"/>
+              <a:rPr lang="zh-TW" altLang="en-US"/>
               <a:t>第二層</a:t>
             </a:r>
           </a:p>
           <a:p>
             <a:pPr lvl="2"/>
             <a:r>
-              <a:rPr lang="zh-TW" altLang="en-US" smtClean="0"/>
+              <a:rPr lang="zh-TW" altLang="en-US"/>
               <a:t>第三層</a:t>
             </a:r>
           </a:p>
           <a:p>
             <a:pPr lvl="3"/>
             <a:r>
-              <a:rPr lang="zh-TW" altLang="en-US" smtClean="0"/>
+              <a:rPr lang="zh-TW" altLang="en-US"/>
               <a:t>第四層</a:t>
             </a:r>
           </a:p>
           <a:p>
             <a:pPr lvl="4"/>
             <a:r>
-              <a:rPr lang="zh-TW" altLang="en-US" smtClean="0"/>
+              <a:rPr lang="zh-TW" altLang="en-US"/>
               <a:t>第五層</a:t>
             </a:r>
-            <a:endParaRPr lang="zh-TW" altLang="en-US"/>
           </a:p>
         </p:txBody>
       </p:sp>
@@ -1295,38 +1284,37 @@
           <a:p>
             <a:pPr lvl="0"/>
             <a:r>
-              <a:rPr lang="zh-TW" altLang="en-US" smtClean="0"/>
+              <a:rPr lang="zh-TW" altLang="en-US"/>
               <a:t>按一下以編輯母片文字樣式</a:t>
             </a:r>
           </a:p>
           <a:p>
             <a:pPr lvl="1"/>
             <a:r>
-              <a:rPr lang="zh-TW" altLang="en-US" smtClean="0"/>
+              <a:rPr lang="zh-TW" altLang="en-US"/>
               <a:t>第二層</a:t>
             </a:r>
           </a:p>
           <a:p>
             <a:pPr lvl="2"/>
             <a:r>
-              <a:rPr lang="zh-TW" altLang="en-US" smtClean="0"/>
+              <a:rPr lang="zh-TW" altLang="en-US"/>
               <a:t>第三層</a:t>
             </a:r>
           </a:p>
           <a:p>
             <a:pPr lvl="3"/>
             <a:r>
-              <a:rPr lang="zh-TW" altLang="en-US" smtClean="0"/>
+              <a:rPr lang="zh-TW" altLang="en-US"/>
               <a:t>第四層</a:t>
             </a:r>
           </a:p>
           <a:p>
             <a:pPr lvl="4"/>
             <a:r>
-              <a:rPr lang="zh-TW" altLang="en-US" smtClean="0"/>
+              <a:rPr lang="zh-TW" altLang="en-US"/>
               <a:t>第五層</a:t>
             </a:r>
-            <a:endParaRPr lang="zh-TW" altLang="en-US"/>
           </a:p>
         </p:txBody>
       </p:sp>
@@ -1348,7 +1336,7 @@
             <a:fld id="{3C8AB4AA-1402-46B5-846B-A57FD5AF7562}" type="datetimeFigureOut">
               <a:rPr lang="zh-TW" altLang="en-US" smtClean="0"/>
               <a:pPr/>
-              <a:t>2020/10/30</a:t>
+              <a:t>2025/1/3</a:t>
             </a:fld>
             <a:endParaRPr lang="zh-TW" altLang="en-US"/>
           </a:p>
@@ -1442,10 +1430,9 @@
           </a:lstStyle>
           <a:p>
             <a:r>
-              <a:rPr lang="zh-TW" altLang="en-US" smtClean="0"/>
+              <a:rPr lang="zh-TW" altLang="en-US"/>
               <a:t>按一下以編輯母片標題樣式</a:t>
             </a:r>
-            <a:endParaRPr lang="zh-TW" altLang="en-US"/>
           </a:p>
         </p:txBody>
       </p:sp>
@@ -1508,7 +1495,7 @@
           <a:p>
             <a:pPr lvl="0"/>
             <a:r>
-              <a:rPr lang="zh-TW" altLang="en-US" smtClean="0"/>
+              <a:rPr lang="zh-TW" altLang="en-US"/>
               <a:t>按一下以編輯母片文字樣式</a:t>
             </a:r>
           </a:p>
@@ -1564,38 +1551,37 @@
           <a:p>
             <a:pPr lvl="0"/>
             <a:r>
-              <a:rPr lang="zh-TW" altLang="en-US" smtClean="0"/>
+              <a:rPr lang="zh-TW" altLang="en-US"/>
               <a:t>按一下以編輯母片文字樣式</a:t>
             </a:r>
           </a:p>
           <a:p>
             <a:pPr lvl="1"/>
             <a:r>
-              <a:rPr lang="zh-TW" altLang="en-US" smtClean="0"/>
+              <a:rPr lang="zh-TW" altLang="en-US"/>
               <a:t>第二層</a:t>
             </a:r>
           </a:p>
           <a:p>
             <a:pPr lvl="2"/>
             <a:r>
-              <a:rPr lang="zh-TW" altLang="en-US" smtClean="0"/>
+              <a:rPr lang="zh-TW" altLang="en-US"/>
               <a:t>第三層</a:t>
             </a:r>
           </a:p>
           <a:p>
             <a:pPr lvl="3"/>
             <a:r>
-              <a:rPr lang="zh-TW" altLang="en-US" smtClean="0"/>
+              <a:rPr lang="zh-TW" altLang="en-US"/>
               <a:t>第四層</a:t>
             </a:r>
           </a:p>
           <a:p>
             <a:pPr lvl="4"/>
             <a:r>
-              <a:rPr lang="zh-TW" altLang="en-US" smtClean="0"/>
+              <a:rPr lang="zh-TW" altLang="en-US"/>
               <a:t>第五層</a:t>
             </a:r>
-            <a:endParaRPr lang="zh-TW" altLang="en-US"/>
           </a:p>
         </p:txBody>
       </p:sp>
@@ -1658,7 +1644,7 @@
           <a:p>
             <a:pPr lvl="0"/>
             <a:r>
-              <a:rPr lang="zh-TW" altLang="en-US" smtClean="0"/>
+              <a:rPr lang="zh-TW" altLang="en-US"/>
               <a:t>按一下以編輯母片文字樣式</a:t>
             </a:r>
           </a:p>
@@ -1714,38 +1700,37 @@
           <a:p>
             <a:pPr lvl="0"/>
             <a:r>
-              <a:rPr lang="zh-TW" altLang="en-US" smtClean="0"/>
+              <a:rPr lang="zh-TW" altLang="en-US"/>
               <a:t>按一下以編輯母片文字樣式</a:t>
             </a:r>
           </a:p>
           <a:p>
             <a:pPr lvl="1"/>
             <a:r>
-              <a:rPr lang="zh-TW" altLang="en-US" smtClean="0"/>
+              <a:rPr lang="zh-TW" altLang="en-US"/>
               <a:t>第二層</a:t>
             </a:r>
           </a:p>
           <a:p>
             <a:pPr lvl="2"/>
             <a:r>
-              <a:rPr lang="zh-TW" altLang="en-US" smtClean="0"/>
+              <a:rPr lang="zh-TW" altLang="en-US"/>
               <a:t>第三層</a:t>
             </a:r>
           </a:p>
           <a:p>
             <a:pPr lvl="3"/>
             <a:r>
-              <a:rPr lang="zh-TW" altLang="en-US" smtClean="0"/>
+              <a:rPr lang="zh-TW" altLang="en-US"/>
               <a:t>第四層</a:t>
             </a:r>
           </a:p>
           <a:p>
             <a:pPr lvl="4"/>
             <a:r>
-              <a:rPr lang="zh-TW" altLang="en-US" smtClean="0"/>
+              <a:rPr lang="zh-TW" altLang="en-US"/>
               <a:t>第五層</a:t>
             </a:r>
-            <a:endParaRPr lang="zh-TW" altLang="en-US"/>
           </a:p>
         </p:txBody>
       </p:sp>
@@ -1767,7 +1752,7 @@
             <a:fld id="{3C8AB4AA-1402-46B5-846B-A57FD5AF7562}" type="datetimeFigureOut">
               <a:rPr lang="zh-TW" altLang="en-US" smtClean="0"/>
               <a:pPr/>
-              <a:t>2020/10/30</a:t>
+              <a:t>2025/1/3</a:t>
             </a:fld>
             <a:endParaRPr lang="zh-TW" altLang="en-US"/>
           </a:p>
@@ -1857,10 +1842,9 @@
           <a:lstStyle/>
           <a:p>
             <a:r>
-              <a:rPr lang="zh-TW" altLang="en-US" smtClean="0"/>
+              <a:rPr lang="zh-TW" altLang="en-US"/>
               <a:t>按一下以編輯母片標題樣式</a:t>
             </a:r>
-            <a:endParaRPr lang="zh-TW" altLang="en-US"/>
           </a:p>
         </p:txBody>
       </p:sp>
@@ -1882,7 +1866,7 @@
             <a:fld id="{3C8AB4AA-1402-46B5-846B-A57FD5AF7562}" type="datetimeFigureOut">
               <a:rPr lang="zh-TW" altLang="en-US" smtClean="0"/>
               <a:pPr/>
-              <a:t>2020/10/30</a:t>
+              <a:t>2025/1/3</a:t>
             </a:fld>
             <a:endParaRPr lang="zh-TW" altLang="en-US"/>
           </a:p>
@@ -1974,7 +1958,7 @@
             <a:fld id="{3C8AB4AA-1402-46B5-846B-A57FD5AF7562}" type="datetimeFigureOut">
               <a:rPr lang="zh-TW" altLang="en-US" smtClean="0"/>
               <a:pPr/>
-              <a:t>2020/10/30</a:t>
+              <a:t>2025/1/3</a:t>
             </a:fld>
             <a:endParaRPr lang="zh-TW" altLang="en-US"/>
           </a:p>
@@ -2073,10 +2057,9 @@
           </a:lstStyle>
           <a:p>
             <a:r>
-              <a:rPr lang="zh-TW" altLang="en-US" smtClean="0"/>
+              <a:rPr lang="zh-TW" altLang="en-US"/>
               <a:t>按一下以編輯母片標題樣式</a:t>
             </a:r>
-            <a:endParaRPr lang="zh-TW" altLang="en-US"/>
           </a:p>
         </p:txBody>
       </p:sp>
@@ -2130,38 +2113,37 @@
           <a:p>
             <a:pPr lvl="0"/>
             <a:r>
-              <a:rPr lang="zh-TW" altLang="en-US" smtClean="0"/>
+              <a:rPr lang="zh-TW" altLang="en-US"/>
               <a:t>按一下以編輯母片文字樣式</a:t>
             </a:r>
           </a:p>
           <a:p>
             <a:pPr lvl="1"/>
             <a:r>
-              <a:rPr lang="zh-TW" altLang="en-US" smtClean="0"/>
+              <a:rPr lang="zh-TW" altLang="en-US"/>
               <a:t>第二層</a:t>
             </a:r>
           </a:p>
           <a:p>
             <a:pPr lvl="2"/>
             <a:r>
-              <a:rPr lang="zh-TW" altLang="en-US" smtClean="0"/>
+              <a:rPr lang="zh-TW" altLang="en-US"/>
               <a:t>第三層</a:t>
             </a:r>
           </a:p>
           <a:p>
             <a:pPr lvl="3"/>
             <a:r>
-              <a:rPr lang="zh-TW" altLang="en-US" smtClean="0"/>
+              <a:rPr lang="zh-TW" altLang="en-US"/>
               <a:t>第四層</a:t>
             </a:r>
           </a:p>
           <a:p>
             <a:pPr lvl="4"/>
             <a:r>
-              <a:rPr lang="zh-TW" altLang="en-US" smtClean="0"/>
+              <a:rPr lang="zh-TW" altLang="en-US"/>
               <a:t>第五層</a:t>
             </a:r>
-            <a:endParaRPr lang="zh-TW" altLang="en-US"/>
           </a:p>
         </p:txBody>
       </p:sp>
@@ -2224,7 +2206,7 @@
           <a:p>
             <a:pPr lvl="0"/>
             <a:r>
-              <a:rPr lang="zh-TW" altLang="en-US" smtClean="0"/>
+              <a:rPr lang="zh-TW" altLang="en-US"/>
               <a:t>按一下以編輯母片文字樣式</a:t>
             </a:r>
           </a:p>
@@ -2248,7 +2230,7 @@
             <a:fld id="{3C8AB4AA-1402-46B5-846B-A57FD5AF7562}" type="datetimeFigureOut">
               <a:rPr lang="zh-TW" altLang="en-US" smtClean="0"/>
               <a:pPr/>
-              <a:t>2020/10/30</a:t>
+              <a:t>2025/1/3</a:t>
             </a:fld>
             <a:endParaRPr lang="zh-TW" altLang="en-US"/>
           </a:p>
@@ -2347,10 +2329,9 @@
           </a:lstStyle>
           <a:p>
             <a:r>
-              <a:rPr lang="zh-TW" altLang="en-US" smtClean="0"/>
+              <a:rPr lang="zh-TW" altLang="en-US"/>
               <a:t>按一下以編輯母片標題樣式</a:t>
             </a:r>
-            <a:endParaRPr lang="zh-TW" altLang="en-US"/>
           </a:p>
         </p:txBody>
       </p:sp>
@@ -2412,10 +2393,9 @@
           </a:lstStyle>
           <a:p>
             <a:r>
-              <a:rPr lang="zh-TW" altLang="en-US" smtClean="0"/>
+              <a:rPr lang="zh-TW" altLang="en-US"/>
               <a:t>按一下圖示以新增圖片</a:t>
             </a:r>
-            <a:endParaRPr lang="zh-TW" altLang="en-US"/>
           </a:p>
         </p:txBody>
       </p:sp>
@@ -2478,7 +2458,7 @@
           <a:p>
             <a:pPr lvl="0"/>
             <a:r>
-              <a:rPr lang="zh-TW" altLang="en-US" smtClean="0"/>
+              <a:rPr lang="zh-TW" altLang="en-US"/>
               <a:t>按一下以編輯母片文字樣式</a:t>
             </a:r>
           </a:p>
@@ -2502,7 +2482,7 @@
             <a:fld id="{3C8AB4AA-1402-46B5-846B-A57FD5AF7562}" type="datetimeFigureOut">
               <a:rPr lang="zh-TW" altLang="en-US" smtClean="0"/>
               <a:pPr/>
-              <a:t>2020/10/30</a:t>
+              <a:t>2025/1/3</a:t>
             </a:fld>
             <a:endParaRPr lang="zh-TW" altLang="en-US"/>
           </a:p>
@@ -2612,10 +2592,9 @@
           <a:lstStyle/>
           <a:p>
             <a:r>
-              <a:rPr lang="zh-TW" altLang="en-US" smtClean="0"/>
+              <a:rPr lang="zh-TW" altLang="en-US"/>
               <a:t>按一下以編輯母片標題樣式</a:t>
             </a:r>
-            <a:endParaRPr lang="zh-TW" altLang="en-US"/>
           </a:p>
         </p:txBody>
       </p:sp>
@@ -2646,38 +2625,37 @@
           <a:p>
             <a:pPr lvl="0"/>
             <a:r>
-              <a:rPr lang="zh-TW" altLang="en-US" smtClean="0"/>
+              <a:rPr lang="zh-TW" altLang="en-US"/>
               <a:t>按一下以編輯母片文字樣式</a:t>
             </a:r>
           </a:p>
           <a:p>
             <a:pPr lvl="1"/>
             <a:r>
-              <a:rPr lang="zh-TW" altLang="en-US" smtClean="0"/>
+              <a:rPr lang="zh-TW" altLang="en-US"/>
               <a:t>第二層</a:t>
             </a:r>
           </a:p>
           <a:p>
             <a:pPr lvl="2"/>
             <a:r>
-              <a:rPr lang="zh-TW" altLang="en-US" smtClean="0"/>
+              <a:rPr lang="zh-TW" altLang="en-US"/>
               <a:t>第三層</a:t>
             </a:r>
           </a:p>
           <a:p>
             <a:pPr lvl="3"/>
             <a:r>
-              <a:rPr lang="zh-TW" altLang="en-US" smtClean="0"/>
+              <a:rPr lang="zh-TW" altLang="en-US"/>
               <a:t>第四層</a:t>
             </a:r>
           </a:p>
           <a:p>
             <a:pPr lvl="4"/>
             <a:r>
-              <a:rPr lang="zh-TW" altLang="en-US" smtClean="0"/>
+              <a:rPr lang="zh-TW" altLang="en-US"/>
               <a:t>第五層</a:t>
             </a:r>
-            <a:endParaRPr lang="zh-TW" altLang="en-US"/>
           </a:p>
         </p:txBody>
       </p:sp>
@@ -2717,7 +2695,7 @@
             <a:fld id="{3C8AB4AA-1402-46B5-846B-A57FD5AF7562}" type="datetimeFigureOut">
               <a:rPr lang="zh-TW" altLang="en-US" smtClean="0"/>
               <a:pPr/>
-              <a:t>2020/10/30</a:t>
+              <a:t>2025/1/3</a:t>
             </a:fld>
             <a:endParaRPr lang="zh-TW" altLang="en-US"/>
           </a:p>
@@ -3111,7 +3089,7 @@
           <a:lstStyle/>
           <a:p>
             <a:r>
-              <a:rPr lang="zh-TW" altLang="en-US" sz="5400" b="1" i="1" dirty="0" smtClean="0">
+              <a:rPr lang="zh-TW" altLang="en-US" sz="5400" b="1" i="1" dirty="0">
                 <a:solidFill>
                   <a:srgbClr val="660033"/>
                 </a:solidFill>
@@ -3125,41 +3103,7 @@
                 <a:latin typeface="微軟正黑體" pitchFamily="34" charset="-120"/>
                 <a:ea typeface="微軟正黑體" pitchFamily="34" charset="-120"/>
               </a:rPr>
-              <a:t>聖</a:t>
-            </a:r>
-            <a:r>
-              <a:rPr lang="zh-TW" altLang="en-US" sz="5400" b="1" i="1" dirty="0">
-                <a:solidFill>
-                  <a:srgbClr val="660033"/>
-                </a:solidFill>
-                <a:effectLst>
-                  <a:outerShdw blurRad="38100" dist="38100" dir="2700000" algn="tl">
-                    <a:srgbClr val="000000">
-                      <a:alpha val="43137"/>
-                    </a:srgbClr>
-                  </a:outerShdw>
-                </a:effectLst>
-                <a:latin typeface="微軟正黑體" pitchFamily="34" charset="-120"/>
-                <a:ea typeface="微軟正黑體" pitchFamily="34" charset="-120"/>
-              </a:rPr>
-              <a:t>潔</a:t>
-            </a:r>
-            <a:r>
-              <a:rPr lang="zh-TW" altLang="en-US" sz="5400" b="1" i="1" dirty="0">
-                <a:solidFill>
-                  <a:srgbClr val="660033"/>
-                </a:solidFill>
-                <a:effectLst>
-                  <a:outerShdw blurRad="38100" dist="38100" dir="2700000" algn="tl">
-                    <a:srgbClr val="000000">
-                      <a:alpha val="43137"/>
-                    </a:srgbClr>
-                  </a:outerShdw>
-                </a:effectLst>
-                <a:latin typeface="微軟正黑體" pitchFamily="34" charset="-120"/>
-                <a:ea typeface="微軟正黑體" pitchFamily="34" charset="-120"/>
-              </a:rPr>
-              <a:t>全能主</a:t>
+              <a:t>聖潔全能主</a:t>
             </a:r>
           </a:p>
         </p:txBody>
@@ -3237,7 +3181,7 @@
                 <a:latin typeface="微軟正黑體" pitchFamily="34" charset="-120"/>
                 <a:ea typeface="微軟正黑體" pitchFamily="34" charset="-120"/>
               </a:rPr>
-              <a:t>袮</a:t>
+              <a:t>祢</a:t>
             </a:r>
             <a:endParaRPr lang="en-US" altLang="zh-TW" sz="4800" b="1" dirty="0">
               <a:solidFill>
@@ -3267,6 +3211,74 @@
               </a:solidFill>
               <a:latin typeface="微軟正黑體" pitchFamily="34" charset="-120"/>
               <a:ea typeface="微軟正黑體" pitchFamily="34" charset="-120"/>
+            </a:endParaRPr>
+          </a:p>
+        </p:txBody>
+      </p:sp>
+      <p:sp>
+        <p:nvSpPr>
+          <p:cNvPr id="2" name="TextBox 1">
+            <a:extLst>
+              <a:ext uri="{FF2B5EF4-FFF2-40B4-BE49-F238E27FC236}">
+                <a16:creationId xmlns:a16="http://schemas.microsoft.com/office/drawing/2014/main" id="{038C8965-D4FF-985C-B656-94784879377A}"/>
+              </a:ext>
+            </a:extLst>
+          </p:cNvPr>
+          <p:cNvSpPr txBox="1"/>
+          <p:nvPr/>
+        </p:nvSpPr>
+        <p:spPr>
+          <a:xfrm>
+            <a:off x="0" y="4083918"/>
+            <a:ext cx="9144000" cy="461665"/>
+          </a:xfrm>
+          <a:prstGeom prst="rect">
+            <a:avLst/>
+          </a:prstGeom>
+          <a:noFill/>
+        </p:spPr>
+        <p:txBody>
+          <a:bodyPr wrap="square" rtlCol="0">
+            <a:spAutoFit/>
+          </a:bodyPr>
+          <a:lstStyle/>
+          <a:p>
+            <a:pPr algn="ctr"/>
+            <a:r>
+              <a:rPr lang="en-US" sz="2400" b="1" dirty="0">
+                <a:solidFill>
+                  <a:srgbClr val="660033"/>
+                </a:solidFill>
+                <a:latin typeface="Microsoft JhengHei" panose="020B0604030504040204" pitchFamily="34" charset="-120"/>
+                <a:ea typeface="Microsoft JhengHei" panose="020B0604030504040204" pitchFamily="34" charset="-120"/>
+              </a:rPr>
+              <a:t>( </a:t>
+            </a:r>
+            <a:r>
+              <a:rPr lang="zh-CN" altLang="en-US" sz="2400" b="1" dirty="0">
+                <a:solidFill>
+                  <a:srgbClr val="660033"/>
+                </a:solidFill>
+                <a:latin typeface="Microsoft JhengHei" panose="020B0604030504040204" pitchFamily="34" charset="-120"/>
+                <a:ea typeface="Microsoft JhengHei" panose="020B0604030504040204" pitchFamily="34" charset="-120"/>
+              </a:rPr>
+              <a:t>正歌</a:t>
+            </a:r>
+            <a:r>
+              <a:rPr lang="en-US" sz="2400" b="1" dirty="0">
+                <a:solidFill>
+                  <a:srgbClr val="660033"/>
+                </a:solidFill>
+                <a:latin typeface="Microsoft JhengHei" panose="020B0604030504040204" pitchFamily="34" charset="-120"/>
+                <a:ea typeface="Microsoft JhengHei" panose="020B0604030504040204" pitchFamily="34" charset="-120"/>
+              </a:rPr>
+              <a:t> )</a:t>
+            </a:r>
+            <a:endParaRPr lang="vi-VN" sz="2400" b="1" dirty="0">
+              <a:solidFill>
+                <a:srgbClr val="660033"/>
+              </a:solidFill>
+              <a:ea typeface="Microsoft JhengHei" panose="020B0604030504040204" pitchFamily="34" charset="-120"/>
             </a:endParaRPr>
           </a:p>
         </p:txBody>
@@ -3344,7 +3356,7 @@
                 <a:latin typeface="微軟正黑體" pitchFamily="34" charset="-120"/>
                 <a:ea typeface="微軟正黑體" pitchFamily="34" charset="-120"/>
               </a:rPr>
-              <a:t>袮</a:t>
+              <a:t>祢</a:t>
             </a:r>
             <a:endParaRPr lang="en-US" altLang="zh-TW" sz="4800" b="1" dirty="0">
               <a:solidFill>
@@ -3368,12 +3380,73 @@
               </a:rPr>
               <a:t>昔在  今在  永在君王</a:t>
             </a:r>
-            <a:endParaRPr lang="zh-TW" altLang="en-US" sz="4800" b="1" dirty="0">
+          </a:p>
+        </p:txBody>
+      </p:sp>
+      <p:sp>
+        <p:nvSpPr>
+          <p:cNvPr id="2" name="TextBox 1">
+            <a:extLst>
+              <a:ext uri="{FF2B5EF4-FFF2-40B4-BE49-F238E27FC236}">
+                <a16:creationId xmlns:a16="http://schemas.microsoft.com/office/drawing/2014/main" id="{050CF99A-021C-8ECA-D63D-C988353943FA}"/>
+              </a:ext>
+            </a:extLst>
+          </p:cNvPr>
+          <p:cNvSpPr txBox="1"/>
+          <p:nvPr/>
+        </p:nvSpPr>
+        <p:spPr>
+          <a:xfrm>
+            <a:off x="0" y="4083918"/>
+            <a:ext cx="9144000" cy="461665"/>
+          </a:xfrm>
+          <a:prstGeom prst="rect">
+            <a:avLst/>
+          </a:prstGeom>
+          <a:noFill/>
+        </p:spPr>
+        <p:txBody>
+          <a:bodyPr wrap="square" rtlCol="0">
+            <a:spAutoFit/>
+          </a:bodyPr>
+          <a:lstStyle/>
+          <a:p>
+            <a:pPr algn="ctr"/>
+            <a:r>
+              <a:rPr lang="en-US" sz="2400" b="1" dirty="0">
+                <a:solidFill>
+                  <a:srgbClr val="660033"/>
+                </a:solidFill>
+                <a:latin typeface="Microsoft JhengHei" panose="020B0604030504040204" pitchFamily="34" charset="-120"/>
+                <a:ea typeface="Microsoft JhengHei" panose="020B0604030504040204" pitchFamily="34" charset="-120"/>
+              </a:rPr>
+              <a:t>( </a:t>
+            </a:r>
+            <a:r>
+              <a:rPr lang="zh-CN" altLang="en-US" sz="2400" b="1" dirty="0">
+                <a:solidFill>
+                  <a:srgbClr val="660033"/>
+                </a:solidFill>
+                <a:latin typeface="Microsoft JhengHei" panose="020B0604030504040204" pitchFamily="34" charset="-120"/>
+                <a:ea typeface="Microsoft JhengHei" panose="020B0604030504040204" pitchFamily="34" charset="-120"/>
+              </a:rPr>
+              <a:t>正歌</a:t>
+            </a:r>
+            <a:r>
+              <a:rPr lang="en-US" sz="2400" b="1" dirty="0">
+                <a:solidFill>
+                  <a:srgbClr val="660033"/>
+                </a:solidFill>
+                <a:latin typeface="Microsoft JhengHei" panose="020B0604030504040204" pitchFamily="34" charset="-120"/>
+                <a:ea typeface="Microsoft JhengHei" panose="020B0604030504040204" pitchFamily="34" charset="-120"/>
+              </a:rPr>
+              <a:t> )</a:t>
+            </a:r>
+            <a:endParaRPr lang="vi-VN" sz="2400" b="1" dirty="0">
               <a:solidFill>
                 <a:srgbClr val="660033"/>
               </a:solidFill>
-              <a:latin typeface="微軟正黑體" pitchFamily="34" charset="-120"/>
-              <a:ea typeface="微軟正黑體" pitchFamily="34" charset="-120"/>
+              <a:ea typeface="Microsoft JhengHei" panose="020B0604030504040204" pitchFamily="34" charset="-120"/>
             </a:endParaRPr>
           </a:p>
         </p:txBody>
@@ -3473,7 +3546,7 @@
                 <a:latin typeface="微軟正黑體" pitchFamily="34" charset="-120"/>
                 <a:ea typeface="微軟正黑體" pitchFamily="34" charset="-120"/>
               </a:rPr>
-              <a:t>袮</a:t>
+              <a:t>祢</a:t>
             </a:r>
             <a:endParaRPr lang="en-US" altLang="zh-TW" sz="4800" b="1" dirty="0">
               <a:solidFill>
@@ -3481,6 +3554,74 @@
               </a:solidFill>
               <a:latin typeface="微軟正黑體" pitchFamily="34" charset="-120"/>
               <a:ea typeface="微軟正黑體" pitchFamily="34" charset="-120"/>
+            </a:endParaRPr>
+          </a:p>
+        </p:txBody>
+      </p:sp>
+      <p:sp>
+        <p:nvSpPr>
+          <p:cNvPr id="2" name="TextBox 1">
+            <a:extLst>
+              <a:ext uri="{FF2B5EF4-FFF2-40B4-BE49-F238E27FC236}">
+                <a16:creationId xmlns:a16="http://schemas.microsoft.com/office/drawing/2014/main" id="{89293B1A-3E63-5234-62F0-BF32DEF56303}"/>
+              </a:ext>
+            </a:extLst>
+          </p:cNvPr>
+          <p:cNvSpPr txBox="1"/>
+          <p:nvPr/>
+        </p:nvSpPr>
+        <p:spPr>
+          <a:xfrm>
+            <a:off x="0" y="4083918"/>
+            <a:ext cx="9144000" cy="461665"/>
+          </a:xfrm>
+          <a:prstGeom prst="rect">
+            <a:avLst/>
+          </a:prstGeom>
+          <a:noFill/>
+        </p:spPr>
+        <p:txBody>
+          <a:bodyPr wrap="square" rtlCol="0">
+            <a:spAutoFit/>
+          </a:bodyPr>
+          <a:lstStyle/>
+          <a:p>
+            <a:pPr algn="ctr"/>
+            <a:r>
+              <a:rPr lang="en-US" sz="2400" b="1" dirty="0">
+                <a:solidFill>
+                  <a:srgbClr val="660033"/>
+                </a:solidFill>
+                <a:latin typeface="Microsoft JhengHei" panose="020B0604030504040204" pitchFamily="34" charset="-120"/>
+                <a:ea typeface="Microsoft JhengHei" panose="020B0604030504040204" pitchFamily="34" charset="-120"/>
+              </a:rPr>
+              <a:t>( </a:t>
+            </a:r>
+            <a:r>
+              <a:rPr lang="zh-CN" altLang="en-US" sz="2400" b="1" dirty="0">
+                <a:solidFill>
+                  <a:srgbClr val="660033"/>
+                </a:solidFill>
+                <a:latin typeface="Microsoft JhengHei" panose="020B0604030504040204" pitchFamily="34" charset="-120"/>
+                <a:ea typeface="Microsoft JhengHei" panose="020B0604030504040204" pitchFamily="34" charset="-120"/>
+              </a:rPr>
+              <a:t>副歌</a:t>
+            </a:r>
+            <a:r>
+              <a:rPr lang="en-US" sz="2400" b="1" dirty="0">
+                <a:solidFill>
+                  <a:srgbClr val="660033"/>
+                </a:solidFill>
+                <a:latin typeface="Microsoft JhengHei" panose="020B0604030504040204" pitchFamily="34" charset="-120"/>
+                <a:ea typeface="Microsoft JhengHei" panose="020B0604030504040204" pitchFamily="34" charset="-120"/>
+              </a:rPr>
+              <a:t> )</a:t>
+            </a:r>
+            <a:endParaRPr lang="vi-VN" sz="2400" b="1" dirty="0">
+              <a:solidFill>
+                <a:srgbClr val="660033"/>
+              </a:solidFill>
+              <a:ea typeface="Microsoft JhengHei" panose="020B0604030504040204" pitchFamily="34" charset="-120"/>
             </a:endParaRPr>
           </a:p>
         </p:txBody>
@@ -3580,7 +3721,7 @@
                 <a:latin typeface="微軟正黑體" pitchFamily="34" charset="-120"/>
                 <a:ea typeface="微軟正黑體" pitchFamily="34" charset="-120"/>
               </a:rPr>
-              <a:t>袮</a:t>
+              <a:t>祢</a:t>
             </a:r>
             <a:endParaRPr lang="zh-TW" altLang="en-US" sz="4800" b="1" dirty="0">
               <a:solidFill>
@@ -3588,6 +3729,74 @@
               </a:solidFill>
               <a:latin typeface="微軟正黑體" pitchFamily="34" charset="-120"/>
               <a:ea typeface="微軟正黑體" pitchFamily="34" charset="-120"/>
+            </a:endParaRPr>
+          </a:p>
+        </p:txBody>
+      </p:sp>
+      <p:sp>
+        <p:nvSpPr>
+          <p:cNvPr id="2" name="TextBox 1">
+            <a:extLst>
+              <a:ext uri="{FF2B5EF4-FFF2-40B4-BE49-F238E27FC236}">
+                <a16:creationId xmlns:a16="http://schemas.microsoft.com/office/drawing/2014/main" id="{03DE8D79-2605-E6B5-15B7-694D99AF0483}"/>
+              </a:ext>
+            </a:extLst>
+          </p:cNvPr>
+          <p:cNvSpPr txBox="1"/>
+          <p:nvPr/>
+        </p:nvSpPr>
+        <p:spPr>
+          <a:xfrm>
+            <a:off x="0" y="4083918"/>
+            <a:ext cx="9144000" cy="461665"/>
+          </a:xfrm>
+          <a:prstGeom prst="rect">
+            <a:avLst/>
+          </a:prstGeom>
+          <a:noFill/>
+        </p:spPr>
+        <p:txBody>
+          <a:bodyPr wrap="square" rtlCol="0">
+            <a:spAutoFit/>
+          </a:bodyPr>
+          <a:lstStyle/>
+          <a:p>
+            <a:pPr algn="ctr"/>
+            <a:r>
+              <a:rPr lang="en-US" sz="2400" b="1" dirty="0">
+                <a:solidFill>
+                  <a:srgbClr val="660033"/>
+                </a:solidFill>
+                <a:latin typeface="Microsoft JhengHei" panose="020B0604030504040204" pitchFamily="34" charset="-120"/>
+                <a:ea typeface="Microsoft JhengHei" panose="020B0604030504040204" pitchFamily="34" charset="-120"/>
+              </a:rPr>
+              <a:t>( </a:t>
+            </a:r>
+            <a:r>
+              <a:rPr lang="zh-CN" altLang="en-US" sz="2400" b="1" dirty="0">
+                <a:solidFill>
+                  <a:srgbClr val="660033"/>
+                </a:solidFill>
+                <a:latin typeface="Microsoft JhengHei" panose="020B0604030504040204" pitchFamily="34" charset="-120"/>
+                <a:ea typeface="Microsoft JhengHei" panose="020B0604030504040204" pitchFamily="34" charset="-120"/>
+              </a:rPr>
+              <a:t>副歌</a:t>
+            </a:r>
+            <a:r>
+              <a:rPr lang="en-US" sz="2400" b="1" dirty="0">
+                <a:solidFill>
+                  <a:srgbClr val="660033"/>
+                </a:solidFill>
+                <a:latin typeface="Microsoft JhengHei" panose="020B0604030504040204" pitchFamily="34" charset="-120"/>
+                <a:ea typeface="Microsoft JhengHei" panose="020B0604030504040204" pitchFamily="34" charset="-120"/>
+              </a:rPr>
+              <a:t> )</a:t>
+            </a:r>
+            <a:endParaRPr lang="vi-VN" sz="2400" b="1" dirty="0">
+              <a:solidFill>
+                <a:srgbClr val="660033"/>
+              </a:solidFill>
+              <a:ea typeface="Microsoft JhengHei" panose="020B0604030504040204" pitchFamily="34" charset="-120"/>
             </a:endParaRPr>
           </a:p>
         </p:txBody>
